--- a/slides/release/03-business-scenarios.pptx
+++ b/slides/release/03-business-scenarios.pptx
@@ -2518,7 +2518,7 @@
         </p:nvSpPr>
         <p:spPr>
           <a:xfrm>
-            <a:off x="495300" y="5672931"/>
+            <a:off x="495300" y="6347910"/>
             <a:ext cx="7507224" cy="877824"/>
           </a:xfrm>
           <a:prstGeom prst="rect">
@@ -2718,203 +2718,7 @@
         </p:nvSpPr>
         <p:spPr>
           <a:xfrm>
-            <a:off x="670750" y="5063331"/>
-            <a:ext cx="7977950" cy="1066800"/>
-          </a:xfrm>
-          <a:prstGeom prst="rect">
-            <a:avLst/>
-          </a:prstGeom>
-          <a:solidFill>
-            <a:srgbClr val="F2F2F2"/>
-          </a:solidFill>
-          <a:ln>
-            <a:solidFill>
-              <a:srgbClr val="D9D9D9"/>
-            </a:solidFill>
-          </a:ln>
-        </p:spPr>
-        <p:style>
-          <a:lnRef idx="1">
-            <a:schemeClr val="accent1"/>
-          </a:lnRef>
-          <a:fillRef idx="3">
-            <a:schemeClr val="accent1"/>
-          </a:fillRef>
-          <a:effectRef idx="2">
-            <a:schemeClr val="accent1"/>
-          </a:effectRef>
-          <a:fontRef idx="minor">
-            <a:schemeClr val="lt1"/>
-          </a:fontRef>
-        </p:style>
-        <p:txBody>
-          <a:bodyPr lIns="128016" tIns="73152" rIns="128016" bIns="73152" rtlCol="0" anchor="ctr"/>
-          <a:lstStyle/>
-          <a:p>
-            <a:pPr algn="ctr"/>
-            <a:r>
-              <a:rPr sz="1800" i="1">
-                <a:solidFill>
-                  <a:srgbClr val="333333"/>
-                </a:solidFill>
-              </a:rPr>
-              <a:t>By the end you have a repeatable recipe for the content you write every week.</a:t>
-            </a:r>
-          </a:p>
-        </p:txBody>
-      </p:sp>
-    </p:spTree>
-  </p:cSld>
-  <p:clrMapOvr>
-    <a:masterClrMapping/>
-  </p:clrMapOvr>
-</p:sld>
-</file>
-
-<file path=ppt/slides/slide2.xml><?xml version="1.0" encoding="utf-8"?>
-<p:sld xmlns:a="http://schemas.openxmlformats.org/drawingml/2006/main" xmlns:r="http://schemas.openxmlformats.org/officeDocument/2006/relationships" xmlns:p="http://schemas.openxmlformats.org/presentationml/2006/main">
-  <p:cSld>
-    <p:spTree>
-      <p:nvGrpSpPr>
-        <p:cNvPr id="1" name=""/>
-        <p:cNvGrpSpPr/>
-        <p:nvPr/>
-      </p:nvGrpSpPr>
-      <p:grpSpPr>
-        <a:xfrm>
-          <a:off x="0" y="0"/>
-          <a:ext cx="0" cy="0"/>
-          <a:chOff x="0" y="0"/>
-          <a:chExt cx="0" cy="0"/>
-        </a:xfrm>
-      </p:grpSpPr>
-      <p:sp>
-        <p:nvSpPr>
-          <p:cNvPr id="2" name="Title 1"/>
-          <p:cNvSpPr>
-            <a:spLocks noGrp="1"/>
-          </p:cNvSpPr>
-          <p:nvPr>
-            <p:ph type="title"/>
-          </p:nvPr>
-        </p:nvSpPr>
-        <p:spPr/>
-        <p:txBody>
-          <a:bodyPr/>
-          <a:lstStyle/>
-          <a:p>
-            <a:r>
-              <a:t>Why This Module</a:t>
-            </a:r>
-          </a:p>
-        </p:txBody>
-      </p:sp>
-      <p:sp>
-        <p:nvSpPr>
-          <p:cNvPr id="3" name="Content Placeholder 2"/>
-          <p:cNvSpPr>
-            <a:spLocks noGrp="1"/>
-          </p:cNvSpPr>
-          <p:nvPr>
-            <p:ph idx="1"/>
-          </p:nvPr>
-        </p:nvSpPr>
-        <p:spPr/>
-        <p:txBody>
-          <a:bodyPr/>
-          <a:lstStyle/>
-          <a:p>
-            <a:r>
-              <a:t> Modules 1-2 gave the mental model and the anatomy. Now: point them at real work.</a:t>
-            </a:r>
-          </a:p>
-          <a:p>
-            <a:r>
-              <a:t> Same skill — framed prompt, right source, demanded format — in every department. Practice across</a:t>
-            </a:r>
-            <a:r>
-              <a:rPr b="1"/>
-              <a:t> marketing, sales, support, ops</a:t>
-            </a:r>
-            <a:r>
-              <a:t> .</a:t>
-            </a:r>
-          </a:p>
-          <a:p>
-            <a:r>
-              <a:t> Two things separate a usable result from a demo-toy:</a:t>
-            </a:r>
-          </a:p>
-          <a:p>
-            <a:pPr lvl="1"/>
-            <a:r>
-              <a:t> Sounds like</a:t>
-            </a:r>
-            <a:r>
-              <a:rPr b="1"/>
-              <a:t> your organization</a:t>
-            </a:r>
-            <a:r>
-              <a:t> (brand voice), not a generic chatbot.</a:t>
-            </a:r>
-          </a:p>
-          <a:p>
-            <a:pPr lvl="1"/>
-            <a:r>
-              <a:rPr b="1"/>
-              <a:t> Grounded in your material</a:t>
-            </a:r>
-            <a:r>
-              <a:t> , not the model's guesses.</a:t>
-            </a:r>
-          </a:p>
-          <a:p>
-            <a:endParaRPr/>
-          </a:p>
-        </p:txBody>
-      </p:sp>
-      <p:sp>
-        <p:nvSpPr>
-          <p:cNvPr id="4" name="TextBox 3"/>
-          <p:cNvSpPr txBox="1"/>
-          <p:nvPr/>
-        </p:nvSpPr>
-        <p:spPr>
-          <a:xfrm>
-            <a:off x="704088" y="8065008"/>
-            <a:ext cx="8915400" cy="228600"/>
-          </a:xfrm>
-          <a:prstGeom prst="rect">
-            <a:avLst/>
-          </a:prstGeom>
-          <a:noFill/>
-        </p:spPr>
-        <p:txBody>
-          <a:bodyPr wrap="none">
-            <a:spAutoFit/>
-          </a:bodyPr>
-          <a:lstStyle/>
-          <a:p>
-            <a:r>
-              <a:rPr sz="800">
-                <a:solidFill>
-                  <a:srgbClr val="000000"/>
-                </a:solidFill>
-              </a:rPr>
-              <a:t>Copyright © 2026 by Elephant Scale, All Rights Reserved</a:t>
-            </a:r>
-          </a:p>
-        </p:txBody>
-      </p:sp>
-      <p:sp>
-        <p:nvSpPr>
-          <p:cNvPr id="5" name="Rectangle 4"/>
-          <p:cNvSpPr/>
-          <p:nvPr/>
-        </p:nvSpPr>
-        <p:spPr>
-          <a:xfrm>
-            <a:off x="704088" y="6130131"/>
+            <a:off x="571500" y="5063331"/>
             <a:ext cx="7507224" cy="877824"/>
           </a:xfrm>
           <a:prstGeom prst="rect">
@@ -2954,7 +2758,7 @@
                   <a:srgbClr val="333333"/>
                 </a:solidFill>
               </a:rPr>
-              <a:t>The technique doesn't change by department. The context you supply does.</a:t>
+              <a:t>By the end you have a repeatable recipe for the content you write every week.</a:t>
             </a:r>
           </a:p>
         </p:txBody>
@@ -2967,7 +2771,7 @@
 </p:sld>
 </file>
 
-<file path=ppt/slides/slide3.xml><?xml version="1.0" encoding="utf-8"?>
+<file path=ppt/slides/slide2.xml><?xml version="1.0" encoding="utf-8"?>
 <p:sld xmlns:a="http://schemas.openxmlformats.org/drawingml/2006/main" xmlns:r="http://schemas.openxmlformats.org/officeDocument/2006/relationships" xmlns:p="http://schemas.openxmlformats.org/presentationml/2006/main">
   <p:cSld>
     <p:spTree>
@@ -3000,7 +2804,7 @@
           <a:lstStyle/>
           <a:p>
             <a:r>
-              <a:t>The Universal Business Pattern</a:t>
+              <a:t>Why This Module</a:t>
             </a:r>
           </a:p>
         </p:txBody>
@@ -3021,73 +2825,51 @@
           <a:lstStyle/>
           <a:p>
             <a:r>
-              <a:t> Almost every business task is a few verbs on your material:</a:t>
+              <a:t> Modules 1-2 gave the mental model and the anatomy. Now: point them at real work.</a:t>
+            </a:r>
+          </a:p>
+          <a:p>
+            <a:r>
+              <a:t> Same skill — framed prompt, right source, demanded format — in every department. Practice across</a:t>
+            </a:r>
+            <a:r>
+              <a:rPr b="1"/>
+              <a:t> marketing, sales, support, ops</a:t>
+            </a:r>
+            <a:r>
+              <a:t> .</a:t>
+            </a:r>
+          </a:p>
+          <a:p>
+            <a:r>
+              <a:t> Two things separate a usable result from a demo-toy:</a:t>
             </a:r>
           </a:p>
           <a:p>
             <a:pPr lvl="1"/>
             <a:r>
+              <a:t> Sounds like</a:t>
+            </a:r>
+            <a:r>
               <a:rPr b="1"/>
-              <a:t> Draft</a:t>
-            </a:r>
-            <a:r>
-              <a:t> — email, memo, post, JD, announcement.</a:t>
+              <a:t> your organization</a:t>
+            </a:r>
+            <a:r>
+              <a:t> (brand voice), not a generic chatbot.</a:t>
             </a:r>
           </a:p>
           <a:p>
             <a:pPr lvl="1"/>
             <a:r>
               <a:rPr b="1"/>
-              <a:t> Summarize</a:t>
-            </a:r>
-            <a:r>
-              <a:t> — long doc / meeting → short, for a specific reader.</a:t>
-            </a:r>
-          </a:p>
-          <a:p>
-            <a:pPr lvl="1"/>
-            <a:r>
-              <a:rPr b="1"/>
-              <a:t> Extract</a:t>
-            </a:r>
-            <a:r>
-              <a:t> — owners, dates, amounts, decisions → clean table.</a:t>
-            </a:r>
-          </a:p>
-          <a:p>
-            <a:pPr lvl="1"/>
-            <a:r>
-              <a:rPr b="1"/>
-              <a:t> Transform</a:t>
-            </a:r>
-            <a:r>
-              <a:t> — rewrite for tone/audience, translate, reformat.</a:t>
-            </a:r>
-          </a:p>
-          <a:p>
-            <a:pPr lvl="1"/>
-            <a:r>
-              <a:rPr b="1"/>
-              <a:t> Classify / route</a:t>
-            </a:r>
-            <a:r>
-              <a:t> — triage by type, priority, sentiment.</a:t>
-            </a:r>
-          </a:p>
-          <a:p>
-            <a:pPr lvl="1"/>
-            <a:r>
-              <a:rPr b="1"/>
-              <a:t> Compare</a:t>
-            </a:r>
-            <a:r>
-              <a:t> — two options or docs: what changed, pros/cons.</a:t>
-            </a:r>
-          </a:p>
-          <a:p>
-            <a:r>
-              <a:t> Pick the verb, supply the source, demand the format. That's the whole move.</a:t>
-            </a:r>
+              <a:t> Grounded in your material</a:t>
+            </a:r>
+            <a:r>
+              <a:t> , not the model's guesses.</a:t>
+            </a:r>
+          </a:p>
+          <a:p>
+            <a:endParaRPr/>
           </a:p>
         </p:txBody>
       </p:sp>
@@ -3124,143 +2906,6 @@
           </a:p>
         </p:txBody>
       </p:sp>
-    </p:spTree>
-  </p:cSld>
-  <p:clrMapOvr>
-    <a:masterClrMapping/>
-  </p:clrMapOvr>
-</p:sld>
-</file>
-
-<file path=ppt/slides/slide4.xml><?xml version="1.0" encoding="utf-8"?>
-<p:sld xmlns:a="http://schemas.openxmlformats.org/drawingml/2006/main" xmlns:r="http://schemas.openxmlformats.org/officeDocument/2006/relationships" xmlns:p="http://schemas.openxmlformats.org/presentationml/2006/main">
-  <p:cSld>
-    <p:spTree>
-      <p:nvGrpSpPr>
-        <p:cNvPr id="1" name=""/>
-        <p:cNvGrpSpPr/>
-        <p:nvPr/>
-      </p:nvGrpSpPr>
-      <p:grpSpPr>
-        <a:xfrm>
-          <a:off x="0" y="0"/>
-          <a:ext cx="0" cy="0"/>
-          <a:chOff x="0" y="0"/>
-          <a:chExt cx="0" cy="0"/>
-        </a:xfrm>
-      </p:grpSpPr>
-      <p:sp>
-        <p:nvSpPr>
-          <p:cNvPr id="2" name="Title 1"/>
-          <p:cNvSpPr>
-            <a:spLocks noGrp="1"/>
-          </p:cNvSpPr>
-          <p:nvPr>
-            <p:ph type="title"/>
-          </p:nvPr>
-        </p:nvSpPr>
-        <p:spPr/>
-        <p:txBody>
-          <a:bodyPr/>
-          <a:lstStyle/>
-          <a:p>
-            <a:r>
-              <a:t>Marketing &amp; Content</a:t>
-            </a:r>
-          </a:p>
-        </p:txBody>
-      </p:sp>
-      <p:sp>
-        <p:nvSpPr>
-          <p:cNvPr id="3" name="Content Placeholder 2"/>
-          <p:cNvSpPr>
-            <a:spLocks noGrp="1"/>
-          </p:cNvSpPr>
-          <p:nvPr>
-            <p:ph idx="1"/>
-          </p:nvPr>
-        </p:nvSpPr>
-        <p:spPr/>
-        <p:txBody>
-          <a:bodyPr/>
-          <a:lstStyle/>
-          <a:p>
-            <a:r>
-              <a:t> Great for</a:t>
-            </a:r>
-            <a:r>
-              <a:rPr b="1"/>
-              <a:t> volume and variation</a:t>
-            </a:r>
-            <a:r>
-              <a:t> , not final truth.</a:t>
-            </a:r>
-          </a:p>
-          <a:p>
-            <a:pPr lvl="1"/>
-            <a:r>
-              <a:t> One brief → five subject lines, three post lengths, short + long version.</a:t>
-            </a:r>
-          </a:p>
-          <a:p>
-            <a:pPr lvl="1"/>
-            <a:r>
-              <a:t> Repurpose: report → LinkedIn post → email → three tweets.</a:t>
-            </a:r>
-          </a:p>
-          <a:p>
-            <a:pPr lvl="1"/>
-            <a:r>
-              <a:t> Ideation: "give me 10 angles, then expand the two strongest."</a:t>
-            </a:r>
-          </a:p>
-          <a:p>
-            <a:r>
-              <a:t> The catch: it invents stats, quotes, customer names.</a:t>
-            </a:r>
-            <a:r>
-              <a:rPr b="1"/>
-              <a:t> Facts come from you; the model supplies the wording.</a:t>
-            </a:r>
-          </a:p>
-          <a:p>
-            <a:endParaRPr b="1"/>
-          </a:p>
-        </p:txBody>
-      </p:sp>
-      <p:sp>
-        <p:nvSpPr>
-          <p:cNvPr id="4" name="TextBox 3"/>
-          <p:cNvSpPr txBox="1"/>
-          <p:nvPr/>
-        </p:nvSpPr>
-        <p:spPr>
-          <a:xfrm>
-            <a:off x="704088" y="8065008"/>
-            <a:ext cx="8915400" cy="228600"/>
-          </a:xfrm>
-          <a:prstGeom prst="rect">
-            <a:avLst/>
-          </a:prstGeom>
-          <a:noFill/>
-        </p:spPr>
-        <p:txBody>
-          <a:bodyPr wrap="none">
-            <a:spAutoFit/>
-          </a:bodyPr>
-          <a:lstStyle/>
-          <a:p>
-            <a:r>
-              <a:rPr sz="800">
-                <a:solidFill>
-                  <a:srgbClr val="000000"/>
-                </a:solidFill>
-              </a:rPr>
-              <a:t>Copyright © 2026 by Elephant Scale, All Rights Reserved</a:t>
-            </a:r>
-          </a:p>
-        </p:txBody>
-      </p:sp>
       <p:sp>
         <p:nvSpPr>
           <p:cNvPr id="5" name="Rectangle 4"/>
@@ -3269,554 +2914,7 @@
         </p:nvSpPr>
         <p:spPr>
           <a:xfrm>
-            <a:off x="254000" y="4395707"/>
-            <a:ext cx="8470900" cy="1658224"/>
-          </a:xfrm>
-          <a:prstGeom prst="rect">
-            <a:avLst/>
-          </a:prstGeom>
-          <a:solidFill>
-            <a:srgbClr val="F2F2F2"/>
-          </a:solidFill>
-          <a:ln>
-            <a:solidFill>
-              <a:srgbClr val="D9D9D9"/>
-            </a:solidFill>
-          </a:ln>
-        </p:spPr>
-        <p:style>
-          <a:lnRef idx="1">
-            <a:schemeClr val="accent1"/>
-          </a:lnRef>
-          <a:fillRef idx="3">
-            <a:schemeClr val="accent1"/>
-          </a:fillRef>
-          <a:effectRef idx="2">
-            <a:schemeClr val="accent1"/>
-          </a:effectRef>
-          <a:fontRef idx="minor">
-            <a:schemeClr val="lt1"/>
-          </a:fontRef>
-        </p:style>
-        <p:txBody>
-          <a:bodyPr lIns="128016" tIns="73152" rIns="128016" bIns="73152" rtlCol="0" anchor="ctr"/>
-          <a:lstStyle/>
-          <a:p>
-            <a:pPr algn="ctr"/>
-            <a:r>
-              <a:rPr sz="1800" i="1">
-                <a:solidFill>
-                  <a:srgbClr val="333333"/>
-                </a:solidFill>
-              </a:rPr>
-              <a:t>Use it to escape the blank page and produce options — then you choose and verify.</a:t>
-            </a:r>
-          </a:p>
-        </p:txBody>
-      </p:sp>
-    </p:spTree>
-  </p:cSld>
-  <p:clrMapOvr>
-    <a:masterClrMapping/>
-  </p:clrMapOvr>
-</p:sld>
-</file>
-
-<file path=ppt/slides/slide5.xml><?xml version="1.0" encoding="utf-8"?>
-<p:sld xmlns:a="http://schemas.openxmlformats.org/drawingml/2006/main" xmlns:r="http://schemas.openxmlformats.org/officeDocument/2006/relationships" xmlns:p="http://schemas.openxmlformats.org/presentationml/2006/main">
-  <p:cSld>
-    <p:spTree>
-      <p:nvGrpSpPr>
-        <p:cNvPr id="1" name=""/>
-        <p:cNvGrpSpPr/>
-        <p:nvPr/>
-      </p:nvGrpSpPr>
-      <p:grpSpPr>
-        <a:xfrm>
-          <a:off x="0" y="0"/>
-          <a:ext cx="0" cy="0"/>
-          <a:chOff x="0" y="0"/>
-          <a:chExt cx="0" cy="0"/>
-        </a:xfrm>
-      </p:grpSpPr>
-      <p:sp>
-        <p:nvSpPr>
-          <p:cNvPr id="2" name="Title 1"/>
-          <p:cNvSpPr>
-            <a:spLocks noGrp="1"/>
-          </p:cNvSpPr>
-          <p:nvPr>
-            <p:ph type="title"/>
-          </p:nvPr>
-        </p:nvSpPr>
-        <p:spPr/>
-        <p:txBody>
-          <a:bodyPr/>
-          <a:lstStyle/>
-          <a:p>
-            <a:r>
-              <a:t>Sales &amp; Customer Service</a:t>
-            </a:r>
-          </a:p>
-        </p:txBody>
-      </p:sp>
-      <p:sp>
-        <p:nvSpPr>
-          <p:cNvPr id="3" name="Content Placeholder 2"/>
-          <p:cNvSpPr>
-            <a:spLocks noGrp="1"/>
-          </p:cNvSpPr>
-          <p:nvPr>
-            <p:ph idx="1"/>
-          </p:nvPr>
-        </p:nvSpPr>
-        <p:spPr/>
-        <p:txBody>
-          <a:bodyPr/>
-          <a:lstStyle/>
-          <a:p>
-            <a:r>
-              <a:t> Highest-leverage, highest-risk — real customers on the other end.</a:t>
-            </a:r>
-          </a:p>
-          <a:p>
-            <a:r>
-              <a:t> Strong uses:</a:t>
-            </a:r>
-          </a:p>
-          <a:p>
-            <a:pPr lvl="1"/>
-            <a:r>
-              <a:t> Draft outreach from a short brief; tailor one message to three personas.</a:t>
-            </a:r>
-          </a:p>
-          <a:p>
-            <a:pPr lvl="1"/>
-            <a:r>
-              <a:rPr b="1"/>
-              <a:t> Objection handling</a:t>
-            </a:r>
-            <a:r>
-              <a:t> — "they said X; draft three responses, one firm, one warm."</a:t>
-            </a:r>
-          </a:p>
-          <a:p>
-            <a:pPr lvl="1"/>
-            <a:r>
-              <a:rPr b="1"/>
-              <a:t> Response drafting grounded in policy</a:t>
-            </a:r>
-            <a:r>
-              <a:t> — quotes</a:t>
-            </a:r>
-            <a:r>
-              <a:rPr i="1"/>
-              <a:t> your</a:t>
-            </a:r>
-            <a:r>
-              <a:t> policy, not a guess.</a:t>
-            </a:r>
-          </a:p>
-          <a:p>
-            <a:r>
-              <a:t> The danger: an assistant that "gives the customer whatever they want" promises what you can't honor.</a:t>
-            </a:r>
-            <a:r>
-              <a:rPr b="1"/>
-              <a:t> Ground replies in real policy</a:t>
-            </a:r>
-            <a:r>
-              <a:t> , keep a human approval step.</a:t>
-            </a:r>
-          </a:p>
-          <a:p>
-            <a:endParaRPr/>
-          </a:p>
-        </p:txBody>
-      </p:sp>
-      <p:sp>
-        <p:nvSpPr>
-          <p:cNvPr id="4" name="TextBox 3"/>
-          <p:cNvSpPr txBox="1"/>
-          <p:nvPr/>
-        </p:nvSpPr>
-        <p:spPr>
-          <a:xfrm>
-            <a:off x="704088" y="8065008"/>
-            <a:ext cx="8915400" cy="228600"/>
-          </a:xfrm>
-          <a:prstGeom prst="rect">
-            <a:avLst/>
-          </a:prstGeom>
-          <a:noFill/>
-        </p:spPr>
-        <p:txBody>
-          <a:bodyPr wrap="none">
-            <a:spAutoFit/>
-          </a:bodyPr>
-          <a:lstStyle/>
-          <a:p>
-            <a:r>
-              <a:rPr sz="800">
-                <a:solidFill>
-                  <a:srgbClr val="000000"/>
-                </a:solidFill>
-              </a:rPr>
-              <a:t>Copyright © 2026 by Elephant Scale, All Rights Reserved</a:t>
-            </a:r>
-          </a:p>
-        </p:txBody>
-      </p:sp>
-      <p:sp>
-        <p:nvSpPr>
-          <p:cNvPr id="5" name="Rectangle 4"/>
-          <p:cNvSpPr/>
-          <p:nvPr/>
-        </p:nvSpPr>
-        <p:spPr>
-          <a:xfrm>
-            <a:off x="419100" y="6425063"/>
-            <a:ext cx="7848600" cy="1152868"/>
-          </a:xfrm>
-          <a:prstGeom prst="rect">
-            <a:avLst/>
-          </a:prstGeom>
-          <a:solidFill>
-            <a:srgbClr val="F2F2F2"/>
-          </a:solidFill>
-          <a:ln>
-            <a:solidFill>
-              <a:srgbClr val="D9D9D9"/>
-            </a:solidFill>
-          </a:ln>
-        </p:spPr>
-        <p:style>
-          <a:lnRef idx="1">
-            <a:schemeClr val="accent1"/>
-          </a:lnRef>
-          <a:fillRef idx="3">
-            <a:schemeClr val="accent1"/>
-          </a:fillRef>
-          <a:effectRef idx="2">
-            <a:schemeClr val="accent1"/>
-          </a:effectRef>
-          <a:fontRef idx="minor">
-            <a:schemeClr val="lt1"/>
-          </a:fontRef>
-        </p:style>
-        <p:txBody>
-          <a:bodyPr lIns="128016" tIns="73152" rIns="128016" bIns="73152" rtlCol="0" anchor="ctr"/>
-          <a:lstStyle/>
-          <a:p>
-            <a:pPr algn="ctr"/>
-            <a:r>
-              <a:rPr sz="1800" i="1">
-                <a:solidFill>
-                  <a:srgbClr val="333333"/>
-                </a:solidFill>
-              </a:rPr>
-              <a:t>Never let the assistant set policy. Give it the policy; let it find the words.</a:t>
-            </a:r>
-          </a:p>
-        </p:txBody>
-      </p:sp>
-    </p:spTree>
-  </p:cSld>
-  <p:clrMapOvr>
-    <a:masterClrMapping/>
-  </p:clrMapOvr>
-</p:sld>
-</file>
-
-<file path=ppt/slides/slide6.xml><?xml version="1.0" encoding="utf-8"?>
-<p:sld xmlns:a="http://schemas.openxmlformats.org/drawingml/2006/main" xmlns:r="http://schemas.openxmlformats.org/officeDocument/2006/relationships" xmlns:p="http://schemas.openxmlformats.org/presentationml/2006/main">
-  <p:cSld>
-    <p:spTree>
-      <p:nvGrpSpPr>
-        <p:cNvPr id="1" name=""/>
-        <p:cNvGrpSpPr/>
-        <p:nvPr/>
-      </p:nvGrpSpPr>
-      <p:grpSpPr>
-        <a:xfrm>
-          <a:off x="0" y="0"/>
-          <a:ext cx="0" cy="0"/>
-          <a:chOff x="0" y="0"/>
-          <a:chExt cx="0" cy="0"/>
-        </a:xfrm>
-      </p:grpSpPr>
-      <p:sp>
-        <p:nvSpPr>
-          <p:cNvPr id="2" name="Title 1"/>
-          <p:cNvSpPr>
-            <a:spLocks noGrp="1"/>
-          </p:cNvSpPr>
-          <p:nvPr>
-            <p:ph type="title"/>
-          </p:nvPr>
-        </p:nvSpPr>
-        <p:spPr/>
-        <p:txBody>
-          <a:bodyPr/>
-          <a:lstStyle/>
-          <a:p>
-            <a:r>
-              <a:t>Operations &amp; HR</a:t>
-            </a:r>
-          </a:p>
-        </p:txBody>
-      </p:sp>
-      <p:sp>
-        <p:nvSpPr>
-          <p:cNvPr id="3" name="Content Placeholder 2"/>
-          <p:cNvSpPr>
-            <a:spLocks noGrp="1"/>
-          </p:cNvSpPr>
-          <p:nvPr>
-            <p:ph idx="1"/>
-          </p:nvPr>
-        </p:nvSpPr>
-        <p:spPr/>
-        <p:txBody>
-          <a:bodyPr/>
-          <a:lstStyle/>
-          <a:p>
-            <a:r>
-              <a:t> The quiet productivity win — internal docs nobody enjoys writing.</a:t>
-            </a:r>
-          </a:p>
-          <a:p>
-            <a:pPr lvl="1"/>
-            <a:r>
-              <a:t> Messy meeting notes → decisions + action items + owners.</a:t>
-            </a:r>
-          </a:p>
-          <a:p>
-            <a:pPr lvl="1"/>
-            <a:r>
-              <a:t> Draft SOPs, policies, job descriptions from bullet points.</a:t>
-            </a:r>
-          </a:p>
-          <a:p>
-            <a:pPr lvl="1"/>
-            <a:r>
-              <a:t> Compare two documents; extract what changed.</a:t>
-            </a:r>
-          </a:p>
-          <a:p>
-            <a:r>
-              <a:t> Source discipline matters most here — a summary that invents an owner is worse than none. Demand:</a:t>
-            </a:r>
-            <a:r>
-              <a:rPr i="1"/>
-              <a:t> "use only the notes; if an owner is unclear, say so."</a:t>
-            </a:r>
-          </a:p>
-        </p:txBody>
-      </p:sp>
-      <p:sp>
-        <p:nvSpPr>
-          <p:cNvPr id="4" name="TextBox 3"/>
-          <p:cNvSpPr txBox="1"/>
-          <p:nvPr/>
-        </p:nvSpPr>
-        <p:spPr>
-          <a:xfrm>
-            <a:off x="704088" y="8065008"/>
-            <a:ext cx="8915400" cy="228600"/>
-          </a:xfrm>
-          <a:prstGeom prst="rect">
-            <a:avLst/>
-          </a:prstGeom>
-          <a:noFill/>
-        </p:spPr>
-        <p:txBody>
-          <a:bodyPr wrap="none">
-            <a:spAutoFit/>
-          </a:bodyPr>
-          <a:lstStyle/>
-          <a:p>
-            <a:r>
-              <a:rPr sz="800">
-                <a:solidFill>
-                  <a:srgbClr val="000000"/>
-                </a:solidFill>
-              </a:rPr>
-              <a:t>Copyright © 2026 by Elephant Scale, All Rights Reserved</a:t>
-            </a:r>
-          </a:p>
-        </p:txBody>
-      </p:sp>
-    </p:spTree>
-  </p:cSld>
-  <p:clrMapOvr>
-    <a:masterClrMapping/>
-  </p:clrMapOvr>
-</p:sld>
-</file>
-
-<file path=ppt/slides/slide7.xml><?xml version="1.0" encoding="utf-8"?>
-<p:sld xmlns:a="http://schemas.openxmlformats.org/drawingml/2006/main" xmlns:r="http://schemas.openxmlformats.org/officeDocument/2006/relationships" xmlns:p="http://schemas.openxmlformats.org/presentationml/2006/main">
-  <p:cSld>
-    <p:spTree>
-      <p:nvGrpSpPr>
-        <p:cNvPr id="1" name=""/>
-        <p:cNvGrpSpPr/>
-        <p:nvPr/>
-      </p:nvGrpSpPr>
-      <p:grpSpPr>
-        <a:xfrm>
-          <a:off x="0" y="0"/>
-          <a:ext cx="0" cy="0"/>
-          <a:chOff x="0" y="0"/>
-          <a:chExt cx="0" cy="0"/>
-        </a:xfrm>
-      </p:grpSpPr>
-      <p:sp>
-        <p:nvSpPr>
-          <p:cNvPr id="2" name="Title 1"/>
-          <p:cNvSpPr>
-            <a:spLocks noGrp="1"/>
-          </p:cNvSpPr>
-          <p:nvPr>
-            <p:ph type="title"/>
-          </p:nvPr>
-        </p:nvSpPr>
-        <p:spPr/>
-        <p:txBody>
-          <a:bodyPr/>
-          <a:lstStyle/>
-          <a:p>
-            <a:r>
-              <a:t>Encoding Brand Voice</a:t>
-            </a:r>
-          </a:p>
-        </p:txBody>
-      </p:sp>
-      <p:sp>
-        <p:nvSpPr>
-          <p:cNvPr id="3" name="Content Placeholder 2"/>
-          <p:cNvSpPr>
-            <a:spLocks noGrp="1"/>
-          </p:cNvSpPr>
-          <p:nvPr>
-            <p:ph idx="1"/>
-          </p:nvPr>
-        </p:nvSpPr>
-        <p:spPr/>
-        <p:txBody>
-          <a:bodyPr/>
-          <a:lstStyle/>
-          <a:p>
-            <a:r>
-              <a:t> "Make it professional" isn't an instruction — it means three things to a lawyer, a nurse, a founder.</a:t>
-            </a:r>
-          </a:p>
-          <a:p>
-            <a:r>
-              <a:t> Instead,</a:t>
-            </a:r>
-            <a:r>
-              <a:rPr b="1"/>
-              <a:t> give the model your voice as material</a:t>
-            </a:r>
-            <a:r>
-              <a:t> :</a:t>
-            </a:r>
-          </a:p>
-          <a:p>
-            <a:pPr lvl="1"/>
-            <a:r>
-              <a:t> A short brand-voice guide (three words, do/don't, words to prefer/avoid).</a:t>
-            </a:r>
-          </a:p>
-          <a:p>
-            <a:pPr lvl="1"/>
-            <a:r>
-              <a:rPr b="1"/>
-              <a:t> One real example sentence</a:t>
-            </a:r>
-            <a:r>
-              <a:t> in your voice — teaches more than a page of adjectives.</a:t>
-            </a:r>
-          </a:p>
-          <a:p>
-            <a:endParaRPr/>
-          </a:p>
-          <a:p>
-            <a:endParaRPr/>
-          </a:p>
-          <a:p>
-            <a:endParaRPr/>
-          </a:p>
-        </p:txBody>
-      </p:sp>
-      <p:sp>
-        <p:nvSpPr>
-          <p:cNvPr id="4" name="TextBox 3"/>
-          <p:cNvSpPr txBox="1"/>
-          <p:nvPr/>
-        </p:nvSpPr>
-        <p:spPr>
-          <a:xfrm>
-            <a:off x="704088" y="8065008"/>
-            <a:ext cx="8915400" cy="228600"/>
-          </a:xfrm>
-          <a:prstGeom prst="rect">
-            <a:avLst/>
-          </a:prstGeom>
-          <a:noFill/>
-        </p:spPr>
-        <p:txBody>
-          <a:bodyPr wrap="none">
-            <a:spAutoFit/>
-          </a:bodyPr>
-          <a:lstStyle/>
-          <a:p>
-            <a:r>
-              <a:rPr sz="800">
-                <a:solidFill>
-                  <a:srgbClr val="000000"/>
-                </a:solidFill>
-              </a:rPr>
-              <a:t>Copyright © 2026 by Elephant Scale, All Rights Reserved</a:t>
-            </a:r>
-          </a:p>
-        </p:txBody>
-      </p:sp>
-      <p:pic>
-        <p:nvPicPr>
-          <p:cNvPr id="5" name="Picture 4" descr="1.png"/>
-          <p:cNvPicPr>
-            <a:picLocks noChangeAspect="1"/>
-          </p:cNvPicPr>
-          <p:nvPr/>
-        </p:nvPicPr>
-        <p:blipFill>
-          <a:blip r:embed="rId2"/>
-          <a:stretch>
-            <a:fillRect/>
-          </a:stretch>
-        </p:blipFill>
-        <p:spPr>
-          <a:xfrm>
-            <a:off x="188912" y="4148931"/>
-            <a:ext cx="8915400" cy="687712"/>
-          </a:xfrm>
-          <a:prstGeom prst="rect">
-            <a:avLst/>
-          </a:prstGeom>
-        </p:spPr>
-      </p:pic>
-      <p:sp>
-        <p:nvSpPr>
-          <p:cNvPr id="6" name="Rectangle 5"/>
-          <p:cNvSpPr/>
-          <p:nvPr/>
-        </p:nvSpPr>
-        <p:spPr>
-          <a:xfrm>
-            <a:off x="419100" y="5977731"/>
+            <a:off x="571500" y="5977731"/>
             <a:ext cx="7507224" cy="877824"/>
           </a:xfrm>
           <a:prstGeom prst="rect">
@@ -3856,6 +2954,908 @@
                   <a:srgbClr val="333333"/>
                 </a:solidFill>
               </a:rPr>
+              <a:t>The technique doesn't change by department. The context you supply does.</a:t>
+            </a:r>
+          </a:p>
+        </p:txBody>
+      </p:sp>
+    </p:spTree>
+  </p:cSld>
+  <p:clrMapOvr>
+    <a:masterClrMapping/>
+  </p:clrMapOvr>
+</p:sld>
+</file>
+
+<file path=ppt/slides/slide3.xml><?xml version="1.0" encoding="utf-8"?>
+<p:sld xmlns:a="http://schemas.openxmlformats.org/drawingml/2006/main" xmlns:r="http://schemas.openxmlformats.org/officeDocument/2006/relationships" xmlns:p="http://schemas.openxmlformats.org/presentationml/2006/main">
+  <p:cSld>
+    <p:spTree>
+      <p:nvGrpSpPr>
+        <p:cNvPr id="1" name=""/>
+        <p:cNvGrpSpPr/>
+        <p:nvPr/>
+      </p:nvGrpSpPr>
+      <p:grpSpPr>
+        <a:xfrm>
+          <a:off x="0" y="0"/>
+          <a:ext cx="0" cy="0"/>
+          <a:chOff x="0" y="0"/>
+          <a:chExt cx="0" cy="0"/>
+        </a:xfrm>
+      </p:grpSpPr>
+      <p:sp>
+        <p:nvSpPr>
+          <p:cNvPr id="2" name="Title 1"/>
+          <p:cNvSpPr>
+            <a:spLocks noGrp="1"/>
+          </p:cNvSpPr>
+          <p:nvPr>
+            <p:ph type="title"/>
+          </p:nvPr>
+        </p:nvSpPr>
+        <p:spPr/>
+        <p:txBody>
+          <a:bodyPr/>
+          <a:lstStyle/>
+          <a:p>
+            <a:r>
+              <a:t>The Universal Business Pattern</a:t>
+            </a:r>
+          </a:p>
+        </p:txBody>
+      </p:sp>
+      <p:sp>
+        <p:nvSpPr>
+          <p:cNvPr id="3" name="Content Placeholder 2"/>
+          <p:cNvSpPr>
+            <a:spLocks noGrp="1"/>
+          </p:cNvSpPr>
+          <p:nvPr>
+            <p:ph idx="1"/>
+          </p:nvPr>
+        </p:nvSpPr>
+        <p:spPr/>
+        <p:txBody>
+          <a:bodyPr/>
+          <a:lstStyle/>
+          <a:p>
+            <a:r>
+              <a:t> Almost every business task is a few verbs on your material:</a:t>
+            </a:r>
+          </a:p>
+          <a:p>
+            <a:pPr lvl="1"/>
+            <a:r>
+              <a:rPr b="1"/>
+              <a:t> Draft</a:t>
+            </a:r>
+            <a:r>
+              <a:t> — email, memo, post, JD, announcement.</a:t>
+            </a:r>
+          </a:p>
+          <a:p>
+            <a:pPr lvl="1"/>
+            <a:r>
+              <a:rPr b="1"/>
+              <a:t> Summarize</a:t>
+            </a:r>
+            <a:r>
+              <a:t> — long doc / meeting → short, for a specific reader.</a:t>
+            </a:r>
+          </a:p>
+          <a:p>
+            <a:pPr lvl="1"/>
+            <a:r>
+              <a:rPr b="1"/>
+              <a:t> Extract</a:t>
+            </a:r>
+            <a:r>
+              <a:t> — owners, dates, amounts, decisions → clean table.</a:t>
+            </a:r>
+          </a:p>
+          <a:p>
+            <a:pPr lvl="1"/>
+            <a:r>
+              <a:rPr b="1"/>
+              <a:t> Transform</a:t>
+            </a:r>
+            <a:r>
+              <a:t> — rewrite for tone/audience, translate, reformat.</a:t>
+            </a:r>
+          </a:p>
+          <a:p>
+            <a:pPr lvl="1"/>
+            <a:r>
+              <a:rPr b="1"/>
+              <a:t> Classify / route</a:t>
+            </a:r>
+            <a:r>
+              <a:t> — triage by type, priority, sentiment.</a:t>
+            </a:r>
+          </a:p>
+          <a:p>
+            <a:pPr lvl="1"/>
+            <a:r>
+              <a:rPr b="1"/>
+              <a:t> Compare</a:t>
+            </a:r>
+            <a:r>
+              <a:t> — two options or docs: what changed, pros/cons.</a:t>
+            </a:r>
+          </a:p>
+          <a:p>
+            <a:r>
+              <a:t> Pick the verb, supply the source, demand the format. That's the whole move.</a:t>
+            </a:r>
+          </a:p>
+        </p:txBody>
+      </p:sp>
+      <p:sp>
+        <p:nvSpPr>
+          <p:cNvPr id="4" name="TextBox 3"/>
+          <p:cNvSpPr txBox="1"/>
+          <p:nvPr/>
+        </p:nvSpPr>
+        <p:spPr>
+          <a:xfrm>
+            <a:off x="704088" y="8065008"/>
+            <a:ext cx="8915400" cy="228600"/>
+          </a:xfrm>
+          <a:prstGeom prst="rect">
+            <a:avLst/>
+          </a:prstGeom>
+          <a:noFill/>
+        </p:spPr>
+        <p:txBody>
+          <a:bodyPr wrap="none">
+            <a:spAutoFit/>
+          </a:bodyPr>
+          <a:lstStyle/>
+          <a:p>
+            <a:r>
+              <a:rPr sz="800">
+                <a:solidFill>
+                  <a:srgbClr val="000000"/>
+                </a:solidFill>
+              </a:rPr>
+              <a:t>Copyright © 2026 by Elephant Scale, All Rights Reserved</a:t>
+            </a:r>
+          </a:p>
+        </p:txBody>
+      </p:sp>
+    </p:spTree>
+  </p:cSld>
+  <p:clrMapOvr>
+    <a:masterClrMapping/>
+  </p:clrMapOvr>
+</p:sld>
+</file>
+
+<file path=ppt/slides/slide4.xml><?xml version="1.0" encoding="utf-8"?>
+<p:sld xmlns:a="http://schemas.openxmlformats.org/drawingml/2006/main" xmlns:r="http://schemas.openxmlformats.org/officeDocument/2006/relationships" xmlns:p="http://schemas.openxmlformats.org/presentationml/2006/main">
+  <p:cSld>
+    <p:spTree>
+      <p:nvGrpSpPr>
+        <p:cNvPr id="1" name=""/>
+        <p:cNvGrpSpPr/>
+        <p:nvPr/>
+      </p:nvGrpSpPr>
+      <p:grpSpPr>
+        <a:xfrm>
+          <a:off x="0" y="0"/>
+          <a:ext cx="0" cy="0"/>
+          <a:chOff x="0" y="0"/>
+          <a:chExt cx="0" cy="0"/>
+        </a:xfrm>
+      </p:grpSpPr>
+      <p:sp>
+        <p:nvSpPr>
+          <p:cNvPr id="2" name="Title 1"/>
+          <p:cNvSpPr>
+            <a:spLocks noGrp="1"/>
+          </p:cNvSpPr>
+          <p:nvPr>
+            <p:ph type="title"/>
+          </p:nvPr>
+        </p:nvSpPr>
+        <p:spPr/>
+        <p:txBody>
+          <a:bodyPr/>
+          <a:lstStyle/>
+          <a:p>
+            <a:r>
+              <a:t>Marketing &amp; Content</a:t>
+            </a:r>
+          </a:p>
+        </p:txBody>
+      </p:sp>
+      <p:sp>
+        <p:nvSpPr>
+          <p:cNvPr id="3" name="Content Placeholder 2"/>
+          <p:cNvSpPr>
+            <a:spLocks noGrp="1"/>
+          </p:cNvSpPr>
+          <p:nvPr>
+            <p:ph idx="1"/>
+          </p:nvPr>
+        </p:nvSpPr>
+        <p:spPr/>
+        <p:txBody>
+          <a:bodyPr/>
+          <a:lstStyle/>
+          <a:p>
+            <a:r>
+              <a:t> Great for</a:t>
+            </a:r>
+            <a:r>
+              <a:rPr b="1"/>
+              <a:t> volume and variation</a:t>
+            </a:r>
+            <a:r>
+              <a:t> , not final truth.</a:t>
+            </a:r>
+          </a:p>
+          <a:p>
+            <a:pPr lvl="1"/>
+            <a:r>
+              <a:t> One brief → five subject lines, three post lengths, short + long version.</a:t>
+            </a:r>
+          </a:p>
+          <a:p>
+            <a:pPr lvl="1"/>
+            <a:r>
+              <a:t> Repurpose: report → LinkedIn post → email → three tweets.</a:t>
+            </a:r>
+          </a:p>
+          <a:p>
+            <a:pPr lvl="1"/>
+            <a:r>
+              <a:t> Ideation: "give me 10 angles, then expand the two strongest."</a:t>
+            </a:r>
+          </a:p>
+          <a:p>
+            <a:r>
+              <a:t> The catch: it invents stats, quotes, customer names.</a:t>
+            </a:r>
+            <a:r>
+              <a:rPr b="1"/>
+              <a:t> Facts come from you; the model supplies the wording.</a:t>
+            </a:r>
+          </a:p>
+          <a:p>
+            <a:endParaRPr b="1"/>
+          </a:p>
+        </p:txBody>
+      </p:sp>
+      <p:sp>
+        <p:nvSpPr>
+          <p:cNvPr id="4" name="TextBox 3"/>
+          <p:cNvSpPr txBox="1"/>
+          <p:nvPr/>
+        </p:nvSpPr>
+        <p:spPr>
+          <a:xfrm>
+            <a:off x="704088" y="8065008"/>
+            <a:ext cx="8915400" cy="228600"/>
+          </a:xfrm>
+          <a:prstGeom prst="rect">
+            <a:avLst/>
+          </a:prstGeom>
+          <a:noFill/>
+        </p:spPr>
+        <p:txBody>
+          <a:bodyPr wrap="none">
+            <a:spAutoFit/>
+          </a:bodyPr>
+          <a:lstStyle/>
+          <a:p>
+            <a:r>
+              <a:rPr sz="800">
+                <a:solidFill>
+                  <a:srgbClr val="000000"/>
+                </a:solidFill>
+              </a:rPr>
+              <a:t>Copyright © 2026 by Elephant Scale, All Rights Reserved</a:t>
+            </a:r>
+          </a:p>
+        </p:txBody>
+      </p:sp>
+      <p:sp>
+        <p:nvSpPr>
+          <p:cNvPr id="5" name="Rectangle 4"/>
+          <p:cNvSpPr/>
+          <p:nvPr/>
+        </p:nvSpPr>
+        <p:spPr>
+          <a:xfrm>
+            <a:off x="495300" y="5215731"/>
+            <a:ext cx="7507224" cy="877824"/>
+          </a:xfrm>
+          <a:prstGeom prst="rect">
+            <a:avLst/>
+          </a:prstGeom>
+          <a:solidFill>
+            <a:srgbClr val="F2F2F2"/>
+          </a:solidFill>
+          <a:ln>
+            <a:solidFill>
+              <a:srgbClr val="D9D9D9"/>
+            </a:solidFill>
+          </a:ln>
+        </p:spPr>
+        <p:style>
+          <a:lnRef idx="1">
+            <a:schemeClr val="accent1"/>
+          </a:lnRef>
+          <a:fillRef idx="3">
+            <a:schemeClr val="accent1"/>
+          </a:fillRef>
+          <a:effectRef idx="2">
+            <a:schemeClr val="accent1"/>
+          </a:effectRef>
+          <a:fontRef idx="minor">
+            <a:schemeClr val="lt1"/>
+          </a:fontRef>
+        </p:style>
+        <p:txBody>
+          <a:bodyPr lIns="128016" tIns="73152" rIns="128016" bIns="73152" rtlCol="0" anchor="ctr"/>
+          <a:lstStyle/>
+          <a:p>
+            <a:pPr algn="ctr"/>
+            <a:r>
+              <a:rPr sz="1800" i="1">
+                <a:solidFill>
+                  <a:srgbClr val="333333"/>
+                </a:solidFill>
+              </a:rPr>
+              <a:t>Use it to escape the blank page and produce options — then you choose and verify.</a:t>
+            </a:r>
+          </a:p>
+        </p:txBody>
+      </p:sp>
+    </p:spTree>
+  </p:cSld>
+  <p:clrMapOvr>
+    <a:masterClrMapping/>
+  </p:clrMapOvr>
+</p:sld>
+</file>
+
+<file path=ppt/slides/slide5.xml><?xml version="1.0" encoding="utf-8"?>
+<p:sld xmlns:a="http://schemas.openxmlformats.org/drawingml/2006/main" xmlns:r="http://schemas.openxmlformats.org/officeDocument/2006/relationships" xmlns:p="http://schemas.openxmlformats.org/presentationml/2006/main">
+  <p:cSld>
+    <p:spTree>
+      <p:nvGrpSpPr>
+        <p:cNvPr id="1" name=""/>
+        <p:cNvGrpSpPr/>
+        <p:nvPr/>
+      </p:nvGrpSpPr>
+      <p:grpSpPr>
+        <a:xfrm>
+          <a:off x="0" y="0"/>
+          <a:ext cx="0" cy="0"/>
+          <a:chOff x="0" y="0"/>
+          <a:chExt cx="0" cy="0"/>
+        </a:xfrm>
+      </p:grpSpPr>
+      <p:sp>
+        <p:nvSpPr>
+          <p:cNvPr id="2" name="Title 1"/>
+          <p:cNvSpPr>
+            <a:spLocks noGrp="1"/>
+          </p:cNvSpPr>
+          <p:nvPr>
+            <p:ph type="title"/>
+          </p:nvPr>
+        </p:nvSpPr>
+        <p:spPr/>
+        <p:txBody>
+          <a:bodyPr/>
+          <a:lstStyle/>
+          <a:p>
+            <a:r>
+              <a:t>Sales &amp; Customer Service</a:t>
+            </a:r>
+          </a:p>
+        </p:txBody>
+      </p:sp>
+      <p:sp>
+        <p:nvSpPr>
+          <p:cNvPr id="3" name="Content Placeholder 2"/>
+          <p:cNvSpPr>
+            <a:spLocks noGrp="1"/>
+          </p:cNvSpPr>
+          <p:nvPr>
+            <p:ph idx="1"/>
+          </p:nvPr>
+        </p:nvSpPr>
+        <p:spPr/>
+        <p:txBody>
+          <a:bodyPr/>
+          <a:lstStyle/>
+          <a:p>
+            <a:r>
+              <a:t> Highest-leverage, highest-risk — real customers on the other end.</a:t>
+            </a:r>
+          </a:p>
+          <a:p>
+            <a:r>
+              <a:t> Strong uses:</a:t>
+            </a:r>
+          </a:p>
+          <a:p>
+            <a:pPr lvl="1"/>
+            <a:r>
+              <a:t> Draft outreach from a short brief; tailor one message to three personas.</a:t>
+            </a:r>
+          </a:p>
+          <a:p>
+            <a:pPr lvl="1"/>
+            <a:r>
+              <a:rPr b="1"/>
+              <a:t> Objection handling</a:t>
+            </a:r>
+            <a:r>
+              <a:t> — "they said X; draft three responses, one firm, one warm."</a:t>
+            </a:r>
+          </a:p>
+          <a:p>
+            <a:pPr lvl="1"/>
+            <a:r>
+              <a:rPr b="1"/>
+              <a:t> Response drafting grounded in policy</a:t>
+            </a:r>
+            <a:r>
+              <a:t> — quotes</a:t>
+            </a:r>
+            <a:r>
+              <a:rPr i="1"/>
+              <a:t> your</a:t>
+            </a:r>
+            <a:r>
+              <a:t> policy, not a guess.</a:t>
+            </a:r>
+          </a:p>
+          <a:p>
+            <a:r>
+              <a:t> The danger: an assistant that "gives the customer whatever they want" promises what you can't honor.</a:t>
+            </a:r>
+            <a:r>
+              <a:rPr b="1"/>
+              <a:t> Ground replies in real policy</a:t>
+            </a:r>
+            <a:r>
+              <a:t> , keep a human approval step.</a:t>
+            </a:r>
+          </a:p>
+          <a:p>
+            <a:endParaRPr/>
+          </a:p>
+        </p:txBody>
+      </p:sp>
+      <p:sp>
+        <p:nvSpPr>
+          <p:cNvPr id="4" name="TextBox 3"/>
+          <p:cNvSpPr txBox="1"/>
+          <p:nvPr/>
+        </p:nvSpPr>
+        <p:spPr>
+          <a:xfrm>
+            <a:off x="704088" y="8065008"/>
+            <a:ext cx="8915400" cy="228600"/>
+          </a:xfrm>
+          <a:prstGeom prst="rect">
+            <a:avLst/>
+          </a:prstGeom>
+          <a:noFill/>
+        </p:spPr>
+        <p:txBody>
+          <a:bodyPr wrap="none">
+            <a:spAutoFit/>
+          </a:bodyPr>
+          <a:lstStyle/>
+          <a:p>
+            <a:r>
+              <a:rPr sz="800">
+                <a:solidFill>
+                  <a:srgbClr val="000000"/>
+                </a:solidFill>
+              </a:rPr>
+              <a:t>Copyright © 2026 by Elephant Scale, All Rights Reserved</a:t>
+            </a:r>
+          </a:p>
+        </p:txBody>
+      </p:sp>
+      <p:sp>
+        <p:nvSpPr>
+          <p:cNvPr id="5" name="Rectangle 4"/>
+          <p:cNvSpPr/>
+          <p:nvPr/>
+        </p:nvSpPr>
+        <p:spPr>
+          <a:xfrm>
+            <a:off x="495300" y="6590174"/>
+            <a:ext cx="7507224" cy="877824"/>
+          </a:xfrm>
+          <a:prstGeom prst="rect">
+            <a:avLst/>
+          </a:prstGeom>
+          <a:solidFill>
+            <a:srgbClr val="F2F2F2"/>
+          </a:solidFill>
+          <a:ln>
+            <a:solidFill>
+              <a:srgbClr val="D9D9D9"/>
+            </a:solidFill>
+          </a:ln>
+        </p:spPr>
+        <p:style>
+          <a:lnRef idx="1">
+            <a:schemeClr val="accent1"/>
+          </a:lnRef>
+          <a:fillRef idx="3">
+            <a:schemeClr val="accent1"/>
+          </a:fillRef>
+          <a:effectRef idx="2">
+            <a:schemeClr val="accent1"/>
+          </a:effectRef>
+          <a:fontRef idx="minor">
+            <a:schemeClr val="lt1"/>
+          </a:fontRef>
+        </p:style>
+        <p:txBody>
+          <a:bodyPr lIns="128016" tIns="73152" rIns="128016" bIns="73152" rtlCol="0" anchor="ctr"/>
+          <a:lstStyle/>
+          <a:p>
+            <a:pPr algn="ctr"/>
+            <a:r>
+              <a:rPr sz="1800" i="1">
+                <a:solidFill>
+                  <a:srgbClr val="333333"/>
+                </a:solidFill>
+              </a:rPr>
+              <a:t>Never let the assistant set policy. Give it the policy; let it find the words.</a:t>
+            </a:r>
+          </a:p>
+        </p:txBody>
+      </p:sp>
+    </p:spTree>
+  </p:cSld>
+  <p:clrMapOvr>
+    <a:masterClrMapping/>
+  </p:clrMapOvr>
+</p:sld>
+</file>
+
+<file path=ppt/slides/slide6.xml><?xml version="1.0" encoding="utf-8"?>
+<p:sld xmlns:a="http://schemas.openxmlformats.org/drawingml/2006/main" xmlns:r="http://schemas.openxmlformats.org/officeDocument/2006/relationships" xmlns:p="http://schemas.openxmlformats.org/presentationml/2006/main">
+  <p:cSld>
+    <p:spTree>
+      <p:nvGrpSpPr>
+        <p:cNvPr id="1" name=""/>
+        <p:cNvGrpSpPr/>
+        <p:nvPr/>
+      </p:nvGrpSpPr>
+      <p:grpSpPr>
+        <a:xfrm>
+          <a:off x="0" y="0"/>
+          <a:ext cx="0" cy="0"/>
+          <a:chOff x="0" y="0"/>
+          <a:chExt cx="0" cy="0"/>
+        </a:xfrm>
+      </p:grpSpPr>
+      <p:sp>
+        <p:nvSpPr>
+          <p:cNvPr id="2" name="Title 1"/>
+          <p:cNvSpPr>
+            <a:spLocks noGrp="1"/>
+          </p:cNvSpPr>
+          <p:nvPr>
+            <p:ph type="title"/>
+          </p:nvPr>
+        </p:nvSpPr>
+        <p:spPr/>
+        <p:txBody>
+          <a:bodyPr/>
+          <a:lstStyle/>
+          <a:p>
+            <a:r>
+              <a:t>Operations &amp; HR</a:t>
+            </a:r>
+          </a:p>
+        </p:txBody>
+      </p:sp>
+      <p:sp>
+        <p:nvSpPr>
+          <p:cNvPr id="3" name="Content Placeholder 2"/>
+          <p:cNvSpPr>
+            <a:spLocks noGrp="1"/>
+          </p:cNvSpPr>
+          <p:nvPr>
+            <p:ph idx="1"/>
+          </p:nvPr>
+        </p:nvSpPr>
+        <p:spPr/>
+        <p:txBody>
+          <a:bodyPr/>
+          <a:lstStyle/>
+          <a:p>
+            <a:r>
+              <a:t> The quiet productivity win — internal docs nobody enjoys writing.</a:t>
+            </a:r>
+          </a:p>
+          <a:p>
+            <a:pPr lvl="1"/>
+            <a:r>
+              <a:t> Messy meeting notes → decisions + action items + owners.</a:t>
+            </a:r>
+          </a:p>
+          <a:p>
+            <a:pPr lvl="1"/>
+            <a:r>
+              <a:t> Draft SOPs, policies, job descriptions from bullet points.</a:t>
+            </a:r>
+          </a:p>
+          <a:p>
+            <a:pPr lvl="1"/>
+            <a:r>
+              <a:t> Compare two documents; extract what changed.</a:t>
+            </a:r>
+          </a:p>
+          <a:p>
+            <a:r>
+              <a:t> Source discipline matters most here — a summary that invents an owner is worse than none. Demand:</a:t>
+            </a:r>
+            <a:r>
+              <a:rPr i="1"/>
+              <a:t> "use only the notes; if an owner is unclear, say so."</a:t>
+            </a:r>
+          </a:p>
+        </p:txBody>
+      </p:sp>
+      <p:sp>
+        <p:nvSpPr>
+          <p:cNvPr id="4" name="TextBox 3"/>
+          <p:cNvSpPr txBox="1"/>
+          <p:nvPr/>
+        </p:nvSpPr>
+        <p:spPr>
+          <a:xfrm>
+            <a:off x="704088" y="8065008"/>
+            <a:ext cx="8915400" cy="228600"/>
+          </a:xfrm>
+          <a:prstGeom prst="rect">
+            <a:avLst/>
+          </a:prstGeom>
+          <a:noFill/>
+        </p:spPr>
+        <p:txBody>
+          <a:bodyPr wrap="none">
+            <a:spAutoFit/>
+          </a:bodyPr>
+          <a:lstStyle/>
+          <a:p>
+            <a:r>
+              <a:rPr sz="800">
+                <a:solidFill>
+                  <a:srgbClr val="000000"/>
+                </a:solidFill>
+              </a:rPr>
+              <a:t>Copyright © 2026 by Elephant Scale, All Rights Reserved</a:t>
+            </a:r>
+          </a:p>
+        </p:txBody>
+      </p:sp>
+    </p:spTree>
+  </p:cSld>
+  <p:clrMapOvr>
+    <a:masterClrMapping/>
+  </p:clrMapOvr>
+</p:sld>
+</file>
+
+<file path=ppt/slides/slide7.xml><?xml version="1.0" encoding="utf-8"?>
+<p:sld xmlns:a="http://schemas.openxmlformats.org/drawingml/2006/main" xmlns:r="http://schemas.openxmlformats.org/officeDocument/2006/relationships" xmlns:p="http://schemas.openxmlformats.org/presentationml/2006/main">
+  <p:cSld>
+    <p:spTree>
+      <p:nvGrpSpPr>
+        <p:cNvPr id="1" name=""/>
+        <p:cNvGrpSpPr/>
+        <p:nvPr/>
+      </p:nvGrpSpPr>
+      <p:grpSpPr>
+        <a:xfrm>
+          <a:off x="0" y="0"/>
+          <a:ext cx="0" cy="0"/>
+          <a:chOff x="0" y="0"/>
+          <a:chExt cx="0" cy="0"/>
+        </a:xfrm>
+      </p:grpSpPr>
+      <p:sp>
+        <p:nvSpPr>
+          <p:cNvPr id="2" name="Title 1"/>
+          <p:cNvSpPr>
+            <a:spLocks noGrp="1"/>
+          </p:cNvSpPr>
+          <p:nvPr>
+            <p:ph type="title"/>
+          </p:nvPr>
+        </p:nvSpPr>
+        <p:spPr/>
+        <p:txBody>
+          <a:bodyPr/>
+          <a:lstStyle/>
+          <a:p>
+            <a:r>
+              <a:t>Encoding Brand Voice</a:t>
+            </a:r>
+          </a:p>
+        </p:txBody>
+      </p:sp>
+      <p:sp>
+        <p:nvSpPr>
+          <p:cNvPr id="3" name="Content Placeholder 2"/>
+          <p:cNvSpPr>
+            <a:spLocks noGrp="1"/>
+          </p:cNvSpPr>
+          <p:nvPr>
+            <p:ph idx="1"/>
+          </p:nvPr>
+        </p:nvSpPr>
+        <p:spPr/>
+        <p:txBody>
+          <a:bodyPr/>
+          <a:lstStyle/>
+          <a:p>
+            <a:r>
+              <a:t> "Make it professional" isn't an instruction — it means three things to a lawyer, a nurse, a founder.</a:t>
+            </a:r>
+          </a:p>
+          <a:p>
+            <a:r>
+              <a:t> Instead,</a:t>
+            </a:r>
+            <a:r>
+              <a:rPr b="1"/>
+              <a:t> give the model your voice as material</a:t>
+            </a:r>
+            <a:r>
+              <a:t> :</a:t>
+            </a:r>
+          </a:p>
+          <a:p>
+            <a:pPr lvl="1"/>
+            <a:r>
+              <a:t> A short brand-voice guide (three words, do/don't, words to prefer/avoid).</a:t>
+            </a:r>
+          </a:p>
+          <a:p>
+            <a:pPr lvl="1"/>
+            <a:r>
+              <a:rPr b="1"/>
+              <a:t> One real example sentence</a:t>
+            </a:r>
+            <a:r>
+              <a:t> in your voice — teaches more than a page of adjectives.</a:t>
+            </a:r>
+          </a:p>
+          <a:p>
+            <a:endParaRPr/>
+          </a:p>
+          <a:p>
+            <a:endParaRPr/>
+          </a:p>
+          <a:p>
+            <a:endParaRPr/>
+          </a:p>
+        </p:txBody>
+      </p:sp>
+      <p:sp>
+        <p:nvSpPr>
+          <p:cNvPr id="4" name="TextBox 3"/>
+          <p:cNvSpPr txBox="1"/>
+          <p:nvPr/>
+        </p:nvSpPr>
+        <p:spPr>
+          <a:xfrm>
+            <a:off x="704088" y="8065008"/>
+            <a:ext cx="8915400" cy="228600"/>
+          </a:xfrm>
+          <a:prstGeom prst="rect">
+            <a:avLst/>
+          </a:prstGeom>
+          <a:noFill/>
+        </p:spPr>
+        <p:txBody>
+          <a:bodyPr wrap="none">
+            <a:spAutoFit/>
+          </a:bodyPr>
+          <a:lstStyle/>
+          <a:p>
+            <a:r>
+              <a:rPr sz="800">
+                <a:solidFill>
+                  <a:srgbClr val="000000"/>
+                </a:solidFill>
+              </a:rPr>
+              <a:t>Copyright © 2026 by Elephant Scale, All Rights Reserved</a:t>
+            </a:r>
+          </a:p>
+        </p:txBody>
+      </p:sp>
+      <p:pic>
+        <p:nvPicPr>
+          <p:cNvPr id="5" name="Picture 4" descr="1.png"/>
+          <p:cNvPicPr>
+            <a:picLocks noChangeAspect="1"/>
+          </p:cNvPicPr>
+          <p:nvPr/>
+        </p:nvPicPr>
+        <p:blipFill>
+          <a:blip r:embed="rId2"/>
+          <a:stretch>
+            <a:fillRect/>
+          </a:stretch>
+        </p:blipFill>
+        <p:spPr>
+          <a:xfrm>
+            <a:off x="89725" y="4148931"/>
+            <a:ext cx="8915400" cy="687712"/>
+          </a:xfrm>
+          <a:prstGeom prst="rect">
+            <a:avLst/>
+          </a:prstGeom>
+        </p:spPr>
+      </p:pic>
+      <p:sp>
+        <p:nvSpPr>
+          <p:cNvPr id="6" name="Rectangle 5"/>
+          <p:cNvSpPr/>
+          <p:nvPr/>
+        </p:nvSpPr>
+        <p:spPr>
+          <a:xfrm>
+            <a:off x="419100" y="6349568"/>
+            <a:ext cx="7507224" cy="877824"/>
+          </a:xfrm>
+          <a:prstGeom prst="rect">
+            <a:avLst/>
+          </a:prstGeom>
+          <a:solidFill>
+            <a:srgbClr val="F2F2F2"/>
+          </a:solidFill>
+          <a:ln>
+            <a:solidFill>
+              <a:srgbClr val="D9D9D9"/>
+            </a:solidFill>
+          </a:ln>
+        </p:spPr>
+        <p:style>
+          <a:lnRef idx="1">
+            <a:schemeClr val="accent1"/>
+          </a:lnRef>
+          <a:fillRef idx="3">
+            <a:schemeClr val="accent1"/>
+          </a:fillRef>
+          <a:effectRef idx="2">
+            <a:schemeClr val="accent1"/>
+          </a:effectRef>
+          <a:fontRef idx="minor">
+            <a:schemeClr val="lt1"/>
+          </a:fontRef>
+        </p:style>
+        <p:txBody>
+          <a:bodyPr lIns="128016" tIns="73152" rIns="128016" bIns="73152" rtlCol="0" anchor="ctr"/>
+          <a:lstStyle/>
+          <a:p>
+            <a:pPr algn="ctr"/>
+            <a:r>
+              <a:rPr sz="1800" i="1">
+                <a:solidFill>
+                  <a:srgbClr val="333333"/>
+                </a:solidFill>
+              </a:rPr>
               <a:t>The example sentence does the heavy lifting. If you give one thing, give that.</a:t>
             </a:r>
           </a:p>
@@ -3990,8 +3990,8 @@
         </p:nvSpPr>
         <p:spPr>
           <a:xfrm>
-            <a:off x="419100" y="4834731"/>
-            <a:ext cx="8077200" cy="877824"/>
+            <a:off x="495300" y="5901531"/>
+            <a:ext cx="7507224" cy="877824"/>
           </a:xfrm>
           <a:prstGeom prst="rect">
             <a:avLst/>
